--- a/public/fun/pack/pptx/weddingpro/결혼식프리미엄_30_감사·답례중심_임페리얼퍼플.pptx
+++ b/public/fun/pack/pptx/weddingpro/결혼식프리미엄_30_감사·답례중심_임페리얼퍼플.pptx
@@ -113,12 +113,12 @@
   <p:extLst>
     <p:ext uri="{521415D9-36F7-43E2-AB2F-B90AF26B5E84}">
       <p14:sectionLst xmlns:p14="http://schemas.microsoft.com/office/powerpoint/2010/main">
-        <p14:section name="시작" id="{91D68D51-B8DF-4F3F-B39B-B9200D0C4408}">
+        <p14:section name="시작" id="{DF40E539-EC30-420D-8CF2-B736F3FBA8CF}">
           <p14:sldIdLst>
             <p14:sldId id="256"/>
           </p14:sldIdLst>
         </p14:section>
-        <p14:section name="본문" id="{463158C4-FDAA-4971-8DC0-F1185EE5E50A}">
+        <p14:section name="본문" id="{1A4AE890-F6AD-4143-A012-0D08FA992BBE}">
           <p14:sldIdLst>
             <p14:sldId id="257"/>
             <p14:sldId id="258"/>
@@ -127,7 +127,7 @@
             <p14:sldId id="261"/>
           </p14:sldIdLst>
         </p14:section>
-        <p14:section name="마무리" id="{D768AE70-1486-4C3C-ADFA-690B468CF566}">
+        <p14:section name="마무리" id="{492131E4-A57B-4624-A860-A6319AF12D39}">
           <p14:sldIdLst>
             <p14:sldId id="262"/>
           </p14:sldIdLst>
@@ -1516,7 +1516,7 @@
             </a:lvl1pPr>
           </a:lstStyle>
           <a:p>
-            <a:fld id="{919ACDD7-3150-40E3-9909-AFB3809C9298}" type="slidenum">
+            <a:fld id="{61EEAA29-31C9-49C1-BD78-EFBD034B9D4A}" type="slidenum">
               <a:rPr lang="en-US"/>
               <a:t>‹#›</a:t>
             </a:fld>
@@ -2242,7 +2242,7 @@
             </a:lvl1pPr>
           </a:lstStyle>
           <a:p>
-            <a:fld id="{52F343E2-1FF6-4FBC-9716-2E72001934DC}" type="slidenum">
+            <a:fld id="{C6060136-1CC9-4BCB-8948-4BB3CC238EE2}" type="slidenum">
               <a:rPr lang="en-US"/>
               <a:t>‹#›</a:t>
             </a:fld>
@@ -2991,7 +2991,7 @@
             </a:lvl1pPr>
           </a:lstStyle>
           <a:p>
-            <a:fld id="{CEDA6F32-16C1-405E-A2FF-C88366CDF5E1}" type="slidenum">
+            <a:fld id="{AC9A9D18-A181-41A6-964D-73659CC93EBD}" type="slidenum">
               <a:rPr lang="en-US"/>
               <a:t>‹#›</a:t>
             </a:fld>
@@ -3904,7 +3904,7 @@
           <a:p>
             <a:r>
               <a:rPr lang="ko-KR"/>
-              <a:t>0000. 00. 00 · 예식장 이름</a:t>
+              <a:t>날짜 입력 · 예식장 이름</a:t>
             </a:r>
           </a:p>
         </p:txBody>
@@ -4147,7 +4147,7 @@
           <a:bodyPr/>
           <a:lstStyle/>
           <a:p>
-            <a:fld id="{2BFC059F-DB26-4679-9352-5F6E2E286C34}" type="slidenum">
+            <a:fld id="{3FA441BE-429A-4797-A9C3-30B9179EF2EF}" type="slidenum">
               <a:rPr lang="en-US"/>
               <a:t>‹#›</a:t>
             </a:fld>
@@ -4571,7 +4571,7 @@
           <a:bodyPr/>
           <a:lstStyle/>
           <a:p>
-            <a:fld id="{1A60964B-D3DC-4966-A5F6-F49E9E509B00}" type="slidenum">
+            <a:fld id="{624D7D78-F419-457E-9C1F-F2B58FF7EF29}" type="slidenum">
               <a:rPr lang="en-US"/>
               <a:t>‹#›</a:t>
             </a:fld>
@@ -4938,7 +4938,7 @@
           <a:bodyPr/>
           <a:lstStyle/>
           <a:p>
-            <a:fld id="{366BE8F9-CE12-46FC-B26F-3AE7C996F6E5}" type="slidenum">
+            <a:fld id="{0016D756-4265-4CBB-B9CF-6CD09EA172FA}" type="slidenum">
               <a:rPr lang="en-US"/>
               <a:t>‹#›</a:t>
             </a:fld>
@@ -6236,7 +6236,7 @@
           <a:bodyPr/>
           <a:lstStyle/>
           <a:p>
-            <a:fld id="{492573BB-1A95-4AD7-8E80-833A599158E1}" type="slidenum">
+            <a:fld id="{21710F07-6290-4662-8D18-5C7F61370537}" type="slidenum">
               <a:rPr lang="en-US"/>
               <a:t>‹#›</a:t>
             </a:fld>
@@ -6346,7 +6346,7 @@
           <a:bodyPr/>
           <a:lstStyle/>
           <a:p>
-            <a:fld id="{C175BE27-5F25-469F-AA38-5B5F4DAA3E8E}" type="slidenum">
+            <a:fld id="{14FFF847-F552-42AC-A390-54C883D08F24}" type="slidenum">
               <a:rPr lang="en-US"/>
               <a:t>‹#›</a:t>
             </a:fld>
